--- a/Helper.pptx
+++ b/Helper.pptx
@@ -7,6 +7,7 @@
   <p:sldIdLst>
     <p:sldId id="256" r:id="rId2"/>
     <p:sldId id="257" r:id="rId3"/>
+    <p:sldId id="258" r:id="rId4"/>
   </p:sldIdLst>
   <p:sldSz cx="12192000" cy="6858000"/>
   <p:notesSz cx="6858000" cy="9144000"/>
@@ -105,6 +106,11 @@
       </a:defRPr>
     </a:lvl9pPr>
   </p:defaultTextStyle>
+  <p:extLst>
+    <p:ext uri="{EFAFB233-063F-42B5-8137-9DF3F51BA10A}">
+      <p15:sldGuideLst xmlns:p15="http://schemas.microsoft.com/office/powerpoint/2012/main"/>
+    </p:ext>
+  </p:extLst>
 </p:presentation>
 </file>
 
@@ -3420,62 +3426,24 @@
             <a:endParaRPr lang="en-IN" dirty="0"/>
           </a:p>
           <a:p>
-            <a:pPr algn="l"/>
-            <a:r>
-              <a:rPr lang="en-IN" sz="1800" dirty="0"/>
-              <a:t>         </a:t>
-            </a:r>
-            <a:r>
-              <a:rPr lang="en-IN" sz="1600" dirty="0"/>
-              <a:t>-</a:t>
-            </a:r>
-            <a:r>
-              <a:rPr lang="en-GB" sz="1600" dirty="0"/>
-              <a:t>The C2F block (Cross-Stage Partial with 2F connections) is an enhanced feature extraction block designed to improve gradient flow, feature reuse, and computational efficiency.</a:t>
-            </a:r>
-            <a:endParaRPr lang="en-IN" sz="1600" dirty="0"/>
-          </a:p>
-          <a:p>
-            <a:pPr algn="l"/>
-            <a:r>
-              <a:rPr lang="en-IN" sz="1600" dirty="0"/>
-              <a:t>          -</a:t>
-            </a:r>
-            <a:r>
-              <a:rPr lang="en-IN" sz="1600" dirty="0" err="1"/>
-              <a:t>CSPDarknet</a:t>
-            </a:r>
-            <a:r>
-              <a:rPr lang="en-IN" sz="1600" dirty="0"/>
-              <a:t>  is </a:t>
-            </a:r>
-            <a:r>
-              <a:rPr lang="en-GB" sz="1600" dirty="0"/>
-              <a:t>Inspired by VGG and </a:t>
-            </a:r>
-            <a:r>
-              <a:rPr lang="en-GB" sz="1600" dirty="0" err="1"/>
-              <a:t>ResNet</a:t>
-            </a:r>
-            <a:r>
-              <a:rPr lang="en-GB" sz="1600" dirty="0"/>
-              <a:t>, but optimized for speed.</a:t>
-            </a:r>
-          </a:p>
-          <a:p>
             <a:pPr algn="l">
               <a:spcBef>
                 <a:spcPts val="0"/>
               </a:spcBef>
             </a:pPr>
             <a:r>
+              <a:rPr lang="en-IN" sz="1800" dirty="0"/>
+              <a:t>         </a:t>
+            </a:r>
+            <a:r>
+              <a:rPr lang="en-IN" sz="1600" dirty="0"/>
+              <a:t>-</a:t>
+            </a:r>
+            <a:r>
               <a:rPr lang="en-GB" sz="1600" dirty="0"/>
-              <a:t>Consists of 3x3 and 1x1 convolutional layers arranged sequentially</a:t>
-            </a:r>
-            <a:r>
-              <a:rPr lang="en-GB" dirty="0"/>
-              <a:t>.</a:t>
-            </a:r>
+              <a:t>The C2F block (Cross-Stage Partial with 2F connections) is an enhanced feature extraction block designed to improve gradient flow, feature reuse, and computational efficiency.</a:t>
+            </a:r>
+            <a:endParaRPr lang="en-IN" sz="1600" dirty="0"/>
           </a:p>
           <a:p>
             <a:pPr algn="l">
@@ -3483,38 +3451,59 @@
                 <a:spcPts val="0"/>
               </a:spcBef>
             </a:pPr>
-            <a:endParaRPr lang="en-GB" dirty="0"/>
+            <a:r>
+              <a:rPr lang="en-IN" sz="1600" dirty="0"/>
+              <a:t>          -</a:t>
+            </a:r>
+            <a:r>
+              <a:rPr lang="en-IN" sz="1600" dirty="0" err="1"/>
+              <a:t>CSPDarknet</a:t>
+            </a:r>
+            <a:r>
+              <a:rPr lang="en-IN" sz="1600" dirty="0"/>
+              <a:t>  is </a:t>
+            </a:r>
+            <a:r>
+              <a:rPr lang="en-GB" sz="1600" dirty="0"/>
+              <a:t>Inspired by VGG and </a:t>
+            </a:r>
+            <a:r>
+              <a:rPr lang="en-GB" sz="1600" dirty="0" err="1"/>
+              <a:t>ResNet</a:t>
+            </a:r>
+            <a:r>
+              <a:rPr lang="en-GB" sz="1600" dirty="0"/>
+              <a:t>, but optimized for speed.</a:t>
+            </a:r>
           </a:p>
           <a:p>
             <a:pPr algn="l">
+              <a:lnSpc>
+                <a:spcPct val="100000"/>
+              </a:lnSpc>
               <a:spcBef>
                 <a:spcPts val="0"/>
               </a:spcBef>
             </a:pPr>
             <a:r>
               <a:rPr lang="en-GB" sz="1600" dirty="0"/>
-              <a:t>2. Neck – Feature Fusion</a:t>
+              <a:t>           -Consists of 3x3 and 1x1 convolutional layers arranged sequentially.</a:t>
             </a:r>
           </a:p>
           <a:p>
             <a:pPr algn="l">
+              <a:lnSpc>
+                <a:spcPct val="100000"/>
+              </a:lnSpc>
               <a:spcBef>
                 <a:spcPts val="0"/>
               </a:spcBef>
             </a:pPr>
             <a:r>
               <a:rPr lang="en-GB" sz="1600" dirty="0"/>
-              <a:t>            - SPPF </a:t>
-            </a:r>
-            <a:r>
-              <a:rPr lang="en-IN" sz="1600" dirty="0"/>
-              <a:t>(Spatial Pyramid Pooling - Fast) - </a:t>
-            </a:r>
-            <a:r>
-              <a:rPr lang="en-GB" sz="1600" dirty="0"/>
-              <a:t>This technique involves a convolution followed by three max-pooling layers, concatenation, and another convolution. I understand that SPPF is designed to detect objects at different scales with lower computational cost compared to its predecessor, SPP.</a:t>
-            </a:r>
-            <a:endParaRPr lang="en-IN" sz="1600" dirty="0"/>
+              <a:t>           -Extracts features at multiple scales (P3, P4, P5).</a:t>
+            </a:r>
+            <a:endParaRPr lang="en-GB" sz="1400" dirty="0"/>
           </a:p>
           <a:p>
             <a:pPr algn="l">
@@ -3532,10 +3521,83 @@
             </a:pPr>
             <a:r>
               <a:rPr lang="en-GB" sz="1600" dirty="0"/>
-              <a:t>             - PAN (Path Aggregation Network)</a:t>
-            </a:r>
-          </a:p>
-          <a:p>
+              <a:t>2. Neck – Feature Fusion</a:t>
+            </a:r>
+          </a:p>
+          <a:p>
+            <a:pPr algn="l">
+              <a:spcBef>
+                <a:spcPts val="0"/>
+              </a:spcBef>
+            </a:pPr>
+            <a:r>
+              <a:rPr lang="en-GB" sz="1600" dirty="0"/>
+              <a:t>            - SPPF </a:t>
+            </a:r>
+            <a:r>
+              <a:rPr lang="en-IN" sz="1600" dirty="0"/>
+              <a:t>(Spatial Pyramid Pooling - Fast) - </a:t>
+            </a:r>
+            <a:r>
+              <a:rPr lang="en-GB" sz="1600" dirty="0"/>
+              <a:t>This technique involves a convolution followed by three max-pooling layers, concatenation, and another convolution. I understand that SPPF is designed to detect objects at different scales with lower computational cost compared to its predecessor, SPP.</a:t>
+            </a:r>
+          </a:p>
+          <a:p>
+            <a:pPr algn="l">
+              <a:spcBef>
+                <a:spcPts val="0"/>
+              </a:spcBef>
+            </a:pPr>
+            <a:r>
+              <a:rPr lang="en-GB" sz="1600" dirty="0"/>
+              <a:t>             - PAN (Path Aggregation Network) - PAN is mainly incorporated in the model to enhance the process of instance segmentation by preserving spatial information.</a:t>
+            </a:r>
+          </a:p>
+          <a:p>
+            <a:pPr algn="l">
+              <a:spcBef>
+                <a:spcPts val="0"/>
+              </a:spcBef>
+            </a:pPr>
+            <a:r>
+              <a:rPr lang="en-GB" sz="1600" dirty="0"/>
+              <a:t>              -Fuses features from different scales.</a:t>
+            </a:r>
+          </a:p>
+          <a:p>
+            <a:pPr algn="l">
+              <a:spcBef>
+                <a:spcPts val="0"/>
+              </a:spcBef>
+            </a:pPr>
+            <a:endParaRPr lang="en-GB" sz="1600" dirty="0"/>
+          </a:p>
+          <a:p>
+            <a:pPr algn="l">
+              <a:spcBef>
+                <a:spcPts val="0"/>
+              </a:spcBef>
+            </a:pPr>
+            <a:r>
+              <a:rPr lang="en-GB" sz="1600" dirty="0"/>
+              <a:t>3. HEAD (Detection)</a:t>
+            </a:r>
+          </a:p>
+          <a:p>
+            <a:pPr algn="l">
+              <a:spcBef>
+                <a:spcPts val="0"/>
+              </a:spcBef>
+            </a:pPr>
+            <a:endParaRPr lang="en-GB" sz="1600" dirty="0"/>
+          </a:p>
+          <a:p>
+            <a:pPr algn="l">
+              <a:spcBef>
+                <a:spcPts val="0"/>
+              </a:spcBef>
+            </a:pPr>
             <a:br>
               <a:rPr lang="en-GB" sz="1600" dirty="0"/>
             </a:br>
@@ -3624,12 +3686,110 @@
               <a:t>Most of the stuff in the project is pre-processing.</a:t>
             </a:r>
           </a:p>
+          <a:p>
+            <a:r>
+              <a:rPr lang="en-IN" dirty="0"/>
+              <a:t>Image size is 640x640</a:t>
+            </a:r>
+          </a:p>
         </p:txBody>
       </p:sp>
     </p:spTree>
     <p:extLst>
       <p:ext uri="{BB962C8B-B14F-4D97-AF65-F5344CB8AC3E}">
         <p14:creationId xmlns:p14="http://schemas.microsoft.com/office/powerpoint/2010/main" val="3968284260"/>
+      </p:ext>
+    </p:extLst>
+  </p:cSld>
+  <p:clrMapOvr>
+    <a:masterClrMapping/>
+  </p:clrMapOvr>
+</p:sld>
+</file>
+
+<file path=ppt/slides/slide3.xml><?xml version="1.0" encoding="utf-8"?>
+<p:sld xmlns:a="http://schemas.openxmlformats.org/drawingml/2006/main" xmlns:r="http://schemas.openxmlformats.org/officeDocument/2006/relationships" xmlns:p="http://schemas.openxmlformats.org/presentationml/2006/main">
+  <p:cSld>
+    <p:spTree>
+      <p:nvGrpSpPr>
+        <p:cNvPr id="1" name=""/>
+        <p:cNvGrpSpPr/>
+        <p:nvPr/>
+      </p:nvGrpSpPr>
+      <p:grpSpPr>
+        <a:xfrm>
+          <a:off x="0" y="0"/>
+          <a:ext cx="0" cy="0"/>
+          <a:chOff x="0" y="0"/>
+          <a:chExt cx="0" cy="0"/>
+        </a:xfrm>
+      </p:grpSpPr>
+      <p:sp>
+        <p:nvSpPr>
+          <p:cNvPr id="2" name="Title 1">
+            <a:extLst>
+              <a:ext uri="{FF2B5EF4-FFF2-40B4-BE49-F238E27FC236}">
+                <a16:creationId xmlns:a16="http://schemas.microsoft.com/office/drawing/2014/main" id="{3C5E650C-BBAB-0F16-D816-038395BEF3B1}"/>
+              </a:ext>
+            </a:extLst>
+          </p:cNvPr>
+          <p:cNvSpPr>
+            <a:spLocks noGrp="1"/>
+          </p:cNvSpPr>
+          <p:nvPr>
+            <p:ph type="title"/>
+          </p:nvPr>
+        </p:nvSpPr>
+        <p:spPr/>
+        <p:txBody>
+          <a:bodyPr/>
+          <a:lstStyle/>
+          <a:p>
+            <a:r>
+              <a:rPr lang="en-IN" dirty="0"/>
+              <a:t>Josh’s stuff	</a:t>
+            </a:r>
+          </a:p>
+        </p:txBody>
+      </p:sp>
+      <p:sp>
+        <p:nvSpPr>
+          <p:cNvPr id="3" name="Content Placeholder 2">
+            <a:extLst>
+              <a:ext uri="{FF2B5EF4-FFF2-40B4-BE49-F238E27FC236}">
+                <a16:creationId xmlns:a16="http://schemas.microsoft.com/office/drawing/2014/main" id="{AD3F3534-38CB-7910-C6CD-D5E930A5F208}"/>
+              </a:ext>
+            </a:extLst>
+          </p:cNvPr>
+          <p:cNvSpPr>
+            <a:spLocks noGrp="1"/>
+          </p:cNvSpPr>
+          <p:nvPr>
+            <p:ph idx="1"/>
+          </p:nvPr>
+        </p:nvSpPr>
+        <p:spPr/>
+        <p:txBody>
+          <a:bodyPr/>
+          <a:lstStyle/>
+          <a:p>
+            <a:r>
+              <a:rPr lang="en-IN" dirty="0"/>
+              <a:t>Kalman filter :</a:t>
+            </a:r>
+          </a:p>
+          <a:p>
+            <a:r>
+              <a:rPr lang="en-IN"/>
+              <a:t>Hungarian algorithm :</a:t>
+            </a:r>
+          </a:p>
+        </p:txBody>
+      </p:sp>
+    </p:spTree>
+    <p:extLst>
+      <p:ext uri="{BB962C8B-B14F-4D97-AF65-F5344CB8AC3E}">
+        <p14:creationId xmlns:p14="http://schemas.microsoft.com/office/powerpoint/2010/main" val="15349082"/>
       </p:ext>
     </p:extLst>
   </p:cSld>

--- a/Helper.pptx
+++ b/Helper.pptx
@@ -3774,15 +3774,48 @@
           <a:lstStyle/>
           <a:p>
             <a:r>
+              <a:rPr lang="en-DE" dirty="0"/>
+              <a:t>SPPF: </a:t>
+            </a:r>
+            <a:r>
+              <a:rPr lang="en-IN" dirty="0"/>
+              <a:t>Spatial Pyramid Pooling - Fast - </a:t>
+            </a:r>
+            <a:r>
+              <a:rPr lang="en-GB" sz="1800" dirty="0"/>
+              <a:t>This technique involves a convolution followed by three max-pooling layers, concatenation, and another convolution. I understand that SPPF is designed to detect objects at different scales with lower computational cost compared to its predecessor, SPP.</a:t>
+            </a:r>
+            <a:endParaRPr lang="en-DE" sz="1800" dirty="0"/>
+          </a:p>
+          <a:p>
+            <a:r>
               <a:rPr lang="en-IN" dirty="0"/>
               <a:t>Kalman filter :</a:t>
             </a:r>
-          </a:p>
-          <a:p>
-            <a:r>
-              <a:rPr lang="en-IN"/>
+            <a:r>
+              <a:rPr lang="en-DE" dirty="0"/>
+              <a:t> (a.k.a. ‘linear quadratic estimation’) – </a:t>
+            </a:r>
+            <a:r>
+              <a:rPr lang="en-DE" sz="1800" dirty="0"/>
+              <a:t>mean square error minimizing algorithm to estimate values of unknown variables (in this case object movement between frames) using measurements observed over time including inaccuracies.</a:t>
+            </a:r>
+            <a:endParaRPr lang="en-IN" sz="1800" dirty="0"/>
+          </a:p>
+          <a:p>
+            <a:r>
+              <a:rPr lang="en-IN" dirty="0"/>
               <a:t>Hungarian algorithm :</a:t>
             </a:r>
+            <a:r>
+              <a:rPr lang="en-DE" dirty="0"/>
+              <a:t> (a.k.a. Kuhn-Munkres Algorithm) </a:t>
+            </a:r>
+            <a:r>
+              <a:rPr lang="en-DE" sz="1800" dirty="0"/>
+              <a:t>combinatorial optimization algorithm, matching items to their minimal/maximal cost in polynomial time (O(n^4)); </a:t>
+            </a:r>
+            <a:endParaRPr lang="en-IN" dirty="0"/>
           </a:p>
         </p:txBody>
       </p:sp>
